--- a/WarriorFit_Presentation.backup.pptx
+++ b/WarriorFit_Presentation.backup.pptx
@@ -3729,7 +3729,7 @@
         </p:nvSpPr>
         <p:spPr>
           <a:xfrm>
-            <a:off x="0" y="210312"/>
+            <a:off x="0" y="109728"/>
             <a:ext cx="12188952" cy="6858000"/>
           </a:xfrm>
           <a:prstGeom prst="rect">
@@ -3761,7 +3761,7 @@
           <a:lstStyle/>
           <a:p>
             <a:pPr algn="ctr"/>
-            <a:endParaRPr/>
+            <a:endParaRPr dirty="0"/>
           </a:p>
         </p:txBody>
       </p:sp>
@@ -19933,13 +19933,22 @@
               </a:spcAft>
             </a:pPr>
             <a:r>
-              <a:rPr sz="1500" b="0">
+              <a:rPr sz="1500" b="0" dirty="0" err="1">
                 <a:solidFill>
                   <a:srgbClr val="1A1A1A"/>
                 </a:solidFill>
                 <a:latin typeface="Calibri"/>
               </a:rPr>
-              <a:t>WarriorFit is a comprehensive fitness and military management application designed to track physical performance, manage personnel data, and generate analytical reports. The system integrates data collection, statistical analysis, and reporting capabilities tailored for military fitness standards.</a:t>
+              <a:t>WarriorFit</a:t>
+            </a:r>
+            <a:r>
+              <a:rPr sz="1500" b="0" dirty="0">
+                <a:solidFill>
+                  <a:srgbClr val="1A1A1A"/>
+                </a:solidFill>
+                <a:latin typeface="Calibri"/>
+              </a:rPr>
+              <a:t> is a comprehensive fitness and military management application designed to track physical performance, manage personnel data, and generate analytical reports. The system integrates data collection, statistical analysis, and reporting capabilities tailored for military fitness standards.</a:t>
             </a:r>
           </a:p>
           <a:p>
@@ -19949,16 +19958,34 @@
               </a:spcAft>
             </a:pPr>
             <a:r>
-              <a:rPr sz="1500" b="0">
+              <a:rPr sz="1500" b="0" dirty="0">
                 <a:solidFill>
                   <a:srgbClr val="1A1A1A"/>
                 </a:solidFill>
                 <a:latin typeface="Calibri"/>
               </a:rPr>
-              <a:t>Each unit within Defence has a </a:t>
-            </a:r>
-            <a:r>
-              <a:rPr sz="1500" b="1">
+              <a:t>Each unit within </a:t>
+            </a:r>
+            <a:r>
+              <a:rPr sz="1500" b="0" dirty="0" err="1">
+                <a:solidFill>
+                  <a:srgbClr val="1A1A1A"/>
+                </a:solidFill>
+                <a:latin typeface="Calibri"/>
+              </a:rPr>
+              <a:t>Defence</a:t>
+            </a:r>
+            <a:r>
+              <a:rPr sz="1500" b="0" dirty="0">
+                <a:solidFill>
+                  <a:srgbClr val="1A1A1A"/>
+                </a:solidFill>
+                <a:latin typeface="Calibri"/>
+              </a:rPr>
+              <a:t> has a </a:t>
+            </a:r>
+            <a:r>
+              <a:rPr sz="1500" b="1" dirty="0">
                 <a:solidFill>
                   <a:srgbClr val="C89B3C"/>
                 </a:solidFill>
@@ -19967,7 +19994,7 @@
               <a:t>physical training cell</a:t>
             </a:r>
             <a:r>
-              <a:rPr sz="1500" b="0">
+              <a:rPr sz="1500" b="0" dirty="0">
                 <a:solidFill>
                   <a:srgbClr val="1A1A1A"/>
                 </a:solidFill>
@@ -19983,7 +20010,7 @@
               </a:spcAft>
             </a:pPr>
             <a:r>
-              <a:rPr sz="1500" b="0">
+              <a:rPr sz="1500" b="0" dirty="0">
                 <a:solidFill>
                   <a:srgbClr val="1A1A1A"/>
                 </a:solidFill>
@@ -19992,7 +20019,7 @@
               <a:t>Annually, every soldier must complete the </a:t>
             </a:r>
             <a:r>
-              <a:rPr sz="1500" b="1">
+              <a:rPr sz="1500" b="1" dirty="0">
                 <a:solidFill>
                   <a:srgbClr val="C89B3C"/>
                 </a:solidFill>
@@ -20001,16 +20028,34 @@
               <a:t>PHEF</a:t>
             </a:r>
             <a:r>
-              <a:rPr sz="1500" b="0">
+              <a:rPr sz="1500" b="0" dirty="0">
                 <a:solidFill>
                   <a:srgbClr val="1A1A1A"/>
                 </a:solidFill>
                 <a:latin typeface="Calibri"/>
               </a:rPr>
-              <a:t> (Physical Fitness Evaluation Defence). In addition, combat units carry out </a:t>
-            </a:r>
-            <a:r>
-              <a:rPr sz="1500" b="1">
+              <a:t> (Physical Fitness Evaluation </a:t>
+            </a:r>
+            <a:r>
+              <a:rPr sz="1500" b="0" dirty="0" err="1">
+                <a:solidFill>
+                  <a:srgbClr val="1A1A1A"/>
+                </a:solidFill>
+                <a:latin typeface="Calibri"/>
+              </a:rPr>
+              <a:t>Defence</a:t>
+            </a:r>
+            <a:r>
+              <a:rPr sz="1500" b="0" dirty="0">
+                <a:solidFill>
+                  <a:srgbClr val="1A1A1A"/>
+                </a:solidFill>
+                <a:latin typeface="Calibri"/>
+              </a:rPr>
+              <a:t>). In addition, combat units carry out </a:t>
+            </a:r>
+            <a:r>
+              <a:rPr sz="1500" b="1" dirty="0">
                 <a:solidFill>
                   <a:srgbClr val="C89B3C"/>
                 </a:solidFill>
@@ -20019,7 +20064,7 @@
               <a:t>functional</a:t>
             </a:r>
             <a:r>
-              <a:rPr sz="1500" b="0">
+              <a:rPr sz="1500" b="0" dirty="0">
                 <a:solidFill>
                   <a:srgbClr val="1A1A1A"/>
                 </a:solidFill>
@@ -20028,7 +20073,7 @@
               <a:t> and </a:t>
             </a:r>
             <a:r>
-              <a:rPr sz="1500" b="1">
+              <a:rPr sz="1500" b="1" dirty="0">
                 <a:solidFill>
                   <a:srgbClr val="C89B3C"/>
                 </a:solidFill>
@@ -20037,16 +20082,34 @@
               <a:t>combat tests</a:t>
             </a:r>
             <a:r>
-              <a:rPr sz="1500" b="0">
+              <a:rPr sz="1500" b="0" dirty="0">
                 <a:solidFill>
                   <a:srgbClr val="1A1A1A"/>
                 </a:solidFill>
                 <a:latin typeface="Calibri"/>
               </a:rPr>
-              <a:t>, while paracommandos must endure additional </a:t>
-            </a:r>
-            <a:r>
-              <a:rPr sz="1500" b="1">
+              <a:t>, while </a:t>
+            </a:r>
+            <a:r>
+              <a:rPr sz="1500" b="0" dirty="0" err="1">
+                <a:solidFill>
+                  <a:srgbClr val="1A1A1A"/>
+                </a:solidFill>
+                <a:latin typeface="Calibri"/>
+              </a:rPr>
+              <a:t>paracommandos</a:t>
+            </a:r>
+            <a:r>
+              <a:rPr sz="1500" b="0" dirty="0">
+                <a:solidFill>
+                  <a:srgbClr val="1A1A1A"/>
+                </a:solidFill>
+                <a:latin typeface="Calibri"/>
+              </a:rPr>
+              <a:t> must endure additional </a:t>
+            </a:r>
+            <a:r>
+              <a:rPr sz="1500" b="1" dirty="0">
                 <a:solidFill>
                   <a:srgbClr val="C89B3C"/>
                 </a:solidFill>
@@ -20055,7 +20118,7 @@
               <a:t>combat evaluations</a:t>
             </a:r>
             <a:r>
-              <a:rPr sz="1500" b="0">
+              <a:rPr sz="1500" b="0" dirty="0">
                 <a:solidFill>
                   <a:srgbClr val="1A1A1A"/>
                 </a:solidFill>
@@ -20071,7 +20134,7 @@
               </a:spcAft>
             </a:pPr>
             <a:r>
-              <a:rPr sz="1500" b="0">
+              <a:rPr sz="1500" b="0" dirty="0">
                 <a:solidFill>
                   <a:srgbClr val="1A1A1A"/>
                 </a:solidFill>
